--- a/Slides/Week01/14：大型語言模型的進化.pptx
+++ b/Slides/Week01/14：大型語言模型的進化.pptx
@@ -562,7 +562,7 @@
           <a:p>
             <a:fld id="{4C5D3C8C-E7F7-4283-BD17-5CBFE586F9BA}" type="datetimeFigureOut">
               <a:rPr lang="zh-TW" altLang="en-US" smtClean="0"/>
-              <a:t>2024/3/14</a:t>
+              <a:t>2024/11/27</a:t>
             </a:fld>
             <a:endParaRPr lang="zh-TW" altLang="en-US"/>
           </a:p>
@@ -4854,7 +4854,7 @@
           <a:p>
             <a:fld id="{F0DA24C8-DA9E-4080-B56C-E24E75A7F8F7}" type="datetimeFigureOut">
               <a:rPr lang="zh-TW" altLang="en-US" smtClean="0"/>
-              <a:t>2024/3/14</a:t>
+              <a:t>2024/11/27</a:t>
             </a:fld>
             <a:endParaRPr lang="zh-TW" altLang="en-US"/>
           </a:p>
@@ -5052,7 +5052,7 @@
           <a:p>
             <a:fld id="{F0DA24C8-DA9E-4080-B56C-E24E75A7F8F7}" type="datetimeFigureOut">
               <a:rPr lang="zh-TW" altLang="en-US" smtClean="0"/>
-              <a:t>2024/3/14</a:t>
+              <a:t>2024/11/27</a:t>
             </a:fld>
             <a:endParaRPr lang="zh-TW" altLang="en-US"/>
           </a:p>
@@ -5260,7 +5260,7 @@
           <a:p>
             <a:fld id="{F0DA24C8-DA9E-4080-B56C-E24E75A7F8F7}" type="datetimeFigureOut">
               <a:rPr lang="zh-TW" altLang="en-US" smtClean="0"/>
-              <a:t>2024/3/14</a:t>
+              <a:t>2024/11/27</a:t>
             </a:fld>
             <a:endParaRPr lang="zh-TW" altLang="en-US"/>
           </a:p>
@@ -5641,7 +5641,7 @@
                 </a:solidFill>
               </a:rPr>
               <a:pPr/>
-              <a:t>3/14/2024</a:t>
+              <a:t>11/27/2024</a:t>
             </a:fld>
             <a:endParaRPr kumimoji="0" lang="en-US" dirty="0"/>
           </a:p>
@@ -5872,7 +5872,7 @@
                 </a:solidFill>
               </a:rPr>
               <a:pPr/>
-              <a:t>3/14/2024</a:t>
+              <a:t>11/27/2024</a:t>
             </a:fld>
             <a:endParaRPr kumimoji="0" lang="en-US" dirty="0"/>
           </a:p>
@@ -6105,7 +6105,7 @@
                 </a:solidFill>
               </a:rPr>
               <a:pPr/>
-              <a:t>3/14/2024</a:t>
+              <a:t>11/27/2024</a:t>
             </a:fld>
             <a:endParaRPr kumimoji="0" lang="en-US" dirty="0"/>
           </a:p>
@@ -6587,7 +6587,7 @@
                 </a:solidFill>
               </a:rPr>
               <a:pPr/>
-              <a:t>3/14/2024</a:t>
+              <a:t>11/27/2024</a:t>
             </a:fld>
             <a:endParaRPr kumimoji="0" lang="en-US" dirty="0"/>
           </a:p>
@@ -6944,7 +6944,7 @@
                 </a:solidFill>
               </a:rPr>
               <a:pPr/>
-              <a:t>3/14/2024</a:t>
+              <a:t>11/27/2024</a:t>
             </a:fld>
             <a:endParaRPr kumimoji="0" lang="en-US" dirty="0"/>
           </a:p>
@@ -7307,7 +7307,7 @@
                 </a:solidFill>
               </a:rPr>
               <a:pPr/>
-              <a:t>3/14/2024</a:t>
+              <a:t>11/27/2024</a:t>
             </a:fld>
             <a:endParaRPr kumimoji="0" lang="en-US" dirty="0"/>
           </a:p>
@@ -7617,7 +7617,7 @@
                 </a:solidFill>
               </a:rPr>
               <a:pPr/>
-              <a:t>3/14/2024</a:t>
+              <a:t>11/27/2024</a:t>
             </a:fld>
             <a:endParaRPr kumimoji="0" lang="en-US" dirty="0"/>
           </a:p>
@@ -7812,7 +7812,7 @@
           <a:p>
             <a:fld id="{F0DA24C8-DA9E-4080-B56C-E24E75A7F8F7}" type="datetimeFigureOut">
               <a:rPr lang="zh-TW" altLang="en-US" smtClean="0"/>
-              <a:t>2024/3/14</a:t>
+              <a:t>2024/11/27</a:t>
             </a:fld>
             <a:endParaRPr lang="zh-TW" altLang="en-US"/>
           </a:p>
@@ -8296,7 +8296,7 @@
                 </a:solidFill>
               </a:rPr>
               <a:pPr/>
-              <a:t>3/14/2024</a:t>
+              <a:t>11/27/2024</a:t>
             </a:fld>
             <a:endParaRPr kumimoji="0" lang="en-US" dirty="0"/>
           </a:p>
@@ -8692,7 +8692,7 @@
                 </a:solidFill>
               </a:rPr>
               <a:pPr/>
-              <a:t>3/14/2024</a:t>
+              <a:t>11/27/2024</a:t>
             </a:fld>
             <a:endParaRPr kumimoji="0" lang="en-US" dirty="0"/>
           </a:p>
@@ -9032,7 +9032,7 @@
                 </a:solidFill>
               </a:rPr>
               <a:pPr/>
-              <a:t>3/14/2024</a:t>
+              <a:t>11/27/2024</a:t>
             </a:fld>
             <a:endParaRPr kumimoji="0" lang="en-US" dirty="0"/>
           </a:p>
@@ -9613,7 +9613,7 @@
                 </a:solidFill>
               </a:rPr>
               <a:pPr/>
-              <a:t>3/14/2024</a:t>
+              <a:t>11/27/2024</a:t>
             </a:fld>
             <a:endParaRPr kumimoji="0" lang="en-US" dirty="0"/>
           </a:p>
@@ -10182,7 +10182,7 @@
                 </a:solidFill>
               </a:rPr>
               <a:pPr/>
-              <a:t>3/14/2024</a:t>
+              <a:t>11/27/2024</a:t>
             </a:fld>
             <a:endParaRPr kumimoji="0" lang="en-US" dirty="0"/>
           </a:p>
@@ -10646,7 +10646,7 @@
                 </a:solidFill>
               </a:rPr>
               <a:pPr/>
-              <a:t>3/14/2024</a:t>
+              <a:t>11/27/2024</a:t>
             </a:fld>
             <a:endParaRPr kumimoji="0" lang="en-US" dirty="0"/>
           </a:p>
@@ -11075,7 +11075,7 @@
                 </a:solidFill>
               </a:rPr>
               <a:pPr/>
-              <a:t>3/14/2024</a:t>
+              <a:t>11/27/2024</a:t>
             </a:fld>
             <a:endParaRPr kumimoji="0" lang="en-US" dirty="0"/>
           </a:p>
@@ -11584,7 +11584,7 @@
                 </a:solidFill>
               </a:rPr>
               <a:pPr/>
-              <a:t>3/14/2024</a:t>
+              <a:t>11/27/2024</a:t>
             </a:fld>
             <a:endParaRPr kumimoji="0" lang="en-US" dirty="0"/>
           </a:p>
@@ -12093,7 +12093,7 @@
                 </a:solidFill>
               </a:rPr>
               <a:pPr/>
-              <a:t>3/14/2024</a:t>
+              <a:t>11/27/2024</a:t>
             </a:fld>
             <a:endParaRPr kumimoji="0" lang="en-US" dirty="0"/>
           </a:p>
@@ -12314,7 +12314,7 @@
                 </a:solidFill>
               </a:rPr>
               <a:pPr/>
-              <a:t>3/14/2024</a:t>
+              <a:t>11/27/2024</a:t>
             </a:fld>
             <a:endParaRPr kumimoji="0" lang="en-US" dirty="0"/>
           </a:p>
@@ -12586,7 +12586,7 @@
           <a:p>
             <a:fld id="{F0DA24C8-DA9E-4080-B56C-E24E75A7F8F7}" type="datetimeFigureOut">
               <a:rPr lang="zh-TW" altLang="en-US" smtClean="0"/>
-              <a:t>2024/3/14</a:t>
+              <a:t>2024/11/27</a:t>
             </a:fld>
             <a:endParaRPr lang="zh-TW" altLang="en-US"/>
           </a:p>
@@ -12922,7 +12922,7 @@
                 </a:solidFill>
               </a:rPr>
               <a:pPr/>
-              <a:t>3/14/2024</a:t>
+              <a:t>11/27/2024</a:t>
             </a:fld>
             <a:endParaRPr kumimoji="0" lang="en-US" dirty="0"/>
           </a:p>
@@ -13146,7 +13146,7 @@
                 </a:solidFill>
               </a:rPr>
               <a:pPr/>
-              <a:t>3/14/2024</a:t>
+              <a:t>11/27/2024</a:t>
             </a:fld>
             <a:endParaRPr kumimoji="0" lang="en-US" dirty="0"/>
           </a:p>
@@ -13327,7 +13327,7 @@
             <a:fld id="{ACB2EC6F-6501-4E04-BD6C-A8A6CABB2C5B}" type="datetimeFigureOut">
               <a:rPr kumimoji="0" lang="en-US" smtClean="0"/>
               <a:pPr/>
-              <a:t>3/14/2024</a:t>
+              <a:t>11/27/2024</a:t>
             </a:fld>
             <a:endParaRPr kumimoji="0" lang="en-US" dirty="0"/>
           </a:p>
@@ -13611,7 +13611,7 @@
           <a:p>
             <a:fld id="{F0DA24C8-DA9E-4080-B56C-E24E75A7F8F7}" type="datetimeFigureOut">
               <a:rPr lang="zh-TW" altLang="en-US" smtClean="0"/>
-              <a:t>2024/3/14</a:t>
+              <a:t>2024/11/27</a:t>
             </a:fld>
             <a:endParaRPr lang="zh-TW" altLang="en-US"/>
           </a:p>
@@ -14023,7 +14023,7 @@
           <a:p>
             <a:fld id="{F0DA24C8-DA9E-4080-B56C-E24E75A7F8F7}" type="datetimeFigureOut">
               <a:rPr lang="zh-TW" altLang="en-US" smtClean="0"/>
-              <a:t>2024/3/14</a:t>
+              <a:t>2024/11/27</a:t>
             </a:fld>
             <a:endParaRPr lang="zh-TW" altLang="en-US"/>
           </a:p>
@@ -14164,7 +14164,7 @@
           <a:p>
             <a:fld id="{F0DA24C8-DA9E-4080-B56C-E24E75A7F8F7}" type="datetimeFigureOut">
               <a:rPr lang="zh-TW" altLang="en-US" smtClean="0"/>
-              <a:t>2024/3/14</a:t>
+              <a:t>2024/11/27</a:t>
             </a:fld>
             <a:endParaRPr lang="zh-TW" altLang="en-US"/>
           </a:p>
@@ -14277,7 +14277,7 @@
           <a:p>
             <a:fld id="{F0DA24C8-DA9E-4080-B56C-E24E75A7F8F7}" type="datetimeFigureOut">
               <a:rPr lang="zh-TW" altLang="en-US" smtClean="0"/>
-              <a:t>2024/3/14</a:t>
+              <a:t>2024/11/27</a:t>
             </a:fld>
             <a:endParaRPr lang="zh-TW" altLang="en-US"/>
           </a:p>
@@ -14588,7 +14588,7 @@
           <a:p>
             <a:fld id="{F0DA24C8-DA9E-4080-B56C-E24E75A7F8F7}" type="datetimeFigureOut">
               <a:rPr lang="zh-TW" altLang="en-US" smtClean="0"/>
-              <a:t>2024/3/14</a:t>
+              <a:t>2024/11/27</a:t>
             </a:fld>
             <a:endParaRPr lang="zh-TW" altLang="en-US"/>
           </a:p>
@@ -14876,7 +14876,7 @@
           <a:p>
             <a:fld id="{F0DA24C8-DA9E-4080-B56C-E24E75A7F8F7}" type="datetimeFigureOut">
               <a:rPr lang="zh-TW" altLang="en-US" smtClean="0"/>
-              <a:t>2024/3/14</a:t>
+              <a:t>2024/11/27</a:t>
             </a:fld>
             <a:endParaRPr lang="zh-TW" altLang="en-US"/>
           </a:p>
@@ -15117,7 +15117,7 @@
           <a:p>
             <a:fld id="{F0DA24C8-DA9E-4080-B56C-E24E75A7F8F7}" type="datetimeFigureOut">
               <a:rPr lang="zh-TW" altLang="en-US" smtClean="0"/>
-              <a:t>2024/3/14</a:t>
+              <a:t>2024/11/27</a:t>
             </a:fld>
             <a:endParaRPr lang="zh-TW" altLang="en-US"/>
           </a:p>
@@ -15689,7 +15689,7 @@
                 </a:solidFill>
               </a:rPr>
               <a:pPr/>
-              <a:t>3/14/2024</a:t>
+              <a:t>11/27/2024</a:t>
             </a:fld>
             <a:endParaRPr kumimoji="0" lang="en-US" sz="1200" dirty="0">
               <a:solidFill>
@@ -16235,7 +16235,7 @@
                 <a:ea typeface="新細明體" panose="02020500000000000000" pitchFamily="18" charset="-120"/>
               </a:rPr>
               <a:pPr/>
-              <a:t>3/14/2024</a:t>
+              <a:t>11/27/2024</a:t>
             </a:fld>
             <a:endParaRPr lang="en-US" dirty="0">
               <a:solidFill>
@@ -16448,7 +16448,7 @@
                 <a:cs typeface="Arial" panose="020B0604020202020204" pitchFamily="34" charset="0"/>
               </a:rPr>
               <a:pPr/>
-              <a:t>3/14/2024</a:t>
+              <a:t>11/27/2024</a:t>
             </a:fld>
             <a:endParaRPr lang="en-US" dirty="0">
               <a:solidFill>
@@ -16750,7 +16750,7 @@
                 <a:cs typeface="Arial" panose="020B0604020202020204" pitchFamily="34" charset="0"/>
               </a:rPr>
               <a:pPr/>
-              <a:t>3/14/2024</a:t>
+              <a:t>11/27/2024</a:t>
             </a:fld>
             <a:endParaRPr lang="en-US" dirty="0">
               <a:solidFill>
@@ -17115,7 +17115,7 @@
                 <a:cs typeface="Arial" panose="020B0604020202020204" pitchFamily="34" charset="0"/>
               </a:rPr>
               <a:pPr/>
-              <a:t>3/14/2024</a:t>
+              <a:t>11/27/2024</a:t>
             </a:fld>
             <a:endParaRPr lang="en-US" dirty="0">
               <a:solidFill>
@@ -17500,7 +17500,7 @@
                 <a:cs typeface="Arial" panose="020B0604020202020204" pitchFamily="34" charset="0"/>
               </a:rPr>
               <a:pPr/>
-              <a:t>3/14/2024</a:t>
+              <a:t>11/27/2024</a:t>
             </a:fld>
             <a:endParaRPr lang="en-US" dirty="0">
               <a:solidFill>
@@ -17905,7 +17905,7 @@
                 <a:cs typeface="Arial" panose="020B0604020202020204" pitchFamily="34" charset="0"/>
               </a:rPr>
               <a:pPr/>
-              <a:t>3/14/2024</a:t>
+              <a:t>11/27/2024</a:t>
             </a:fld>
             <a:endParaRPr lang="en-US" dirty="0">
               <a:solidFill>
@@ -18230,7 +18230,7 @@
                 <a:cs typeface="Arial" panose="020B0604020202020204" pitchFamily="34" charset="0"/>
               </a:rPr>
               <a:pPr/>
-              <a:t>3/14/2024</a:t>
+              <a:t>11/27/2024</a:t>
             </a:fld>
             <a:endParaRPr lang="en-US" dirty="0">
               <a:solidFill>
@@ -18536,7 +18536,7 @@
                 <a:cs typeface="Arial" panose="020B0604020202020204" pitchFamily="34" charset="0"/>
               </a:rPr>
               <a:pPr/>
-              <a:t>3/14/2024</a:t>
+              <a:t>11/27/2024</a:t>
             </a:fld>
             <a:endParaRPr lang="en-US" dirty="0">
               <a:solidFill>
@@ -18822,7 +18822,7 @@
                 <a:cs typeface="Arial" panose="020B0604020202020204" pitchFamily="34" charset="0"/>
               </a:rPr>
               <a:pPr/>
-              <a:t>3/14/2024</a:t>
+              <a:t>11/27/2024</a:t>
             </a:fld>
             <a:endParaRPr lang="en-US" dirty="0">
               <a:solidFill>
@@ -19088,7 +19088,7 @@
                 <a:cs typeface="Arial" panose="020B0604020202020204" pitchFamily="34" charset="0"/>
               </a:rPr>
               <a:pPr/>
-              <a:t>3/14/2024</a:t>
+              <a:t>11/27/2024</a:t>
             </a:fld>
             <a:endParaRPr lang="en-US" dirty="0">
               <a:solidFill>
@@ -19429,7 +19429,7 @@
                 <a:cs typeface="Arial" panose="020B0604020202020204" pitchFamily="34" charset="0"/>
               </a:rPr>
               <a:pPr/>
-              <a:t>3/14/2024</a:t>
+              <a:t>11/27/2024</a:t>
             </a:fld>
             <a:endParaRPr lang="en-US" dirty="0">
               <a:solidFill>
@@ -19851,7 +19851,7 @@
                 <a:cs typeface="Arial" panose="020B0604020202020204" pitchFamily="34" charset="0"/>
               </a:rPr>
               <a:pPr/>
-              <a:t>3/14/2024</a:t>
+              <a:t>11/27/2024</a:t>
             </a:fld>
             <a:endParaRPr lang="en-US" dirty="0">
               <a:solidFill>
@@ -20393,7 +20393,7 @@
                 <a:cs typeface="Arial" panose="020B0604020202020204" pitchFamily="34" charset="0"/>
               </a:rPr>
               <a:pPr/>
-              <a:t>3/14/2024</a:t>
+              <a:t>11/27/2024</a:t>
             </a:fld>
             <a:endParaRPr lang="en-US" dirty="0">
               <a:solidFill>
@@ -20692,7 +20692,7 @@
                 <a:cs typeface="Arial" panose="020B0604020202020204" pitchFamily="34" charset="0"/>
               </a:rPr>
               <a:pPr/>
-              <a:t>3/14/2024</a:t>
+              <a:t>11/27/2024</a:t>
             </a:fld>
             <a:endParaRPr lang="en-US" dirty="0">
               <a:solidFill>
@@ -21143,7 +21143,7 @@
                 <a:cs typeface="Arial" panose="020B0604020202020204" pitchFamily="34" charset="0"/>
               </a:rPr>
               <a:pPr/>
-              <a:t>3/14/2024</a:t>
+              <a:t>11/27/2024</a:t>
             </a:fld>
             <a:endParaRPr lang="en-US" dirty="0">
               <a:solidFill>
@@ -21460,7 +21460,7 @@
                 <a:cs typeface="Arial" panose="020B0604020202020204" pitchFamily="34" charset="0"/>
               </a:rPr>
               <a:pPr/>
-              <a:t>3/14/2024</a:t>
+              <a:t>11/27/2024</a:t>
             </a:fld>
             <a:endParaRPr lang="en-US" dirty="0">
               <a:solidFill>
@@ -21906,7 +21906,7 @@
                 <a:cs typeface="Arial" panose="020B0604020202020204" pitchFamily="34" charset="0"/>
               </a:rPr>
               <a:pPr/>
-              <a:t>3/14/2024</a:t>
+              <a:t>11/27/2024</a:t>
             </a:fld>
             <a:endParaRPr lang="en-US" dirty="0">
               <a:solidFill>
@@ -22135,7 +22135,7 @@
                 <a:cs typeface="Arial" panose="020B0604020202020204" pitchFamily="34" charset="0"/>
               </a:rPr>
               <a:pPr/>
-              <a:t>3/14/2024</a:t>
+              <a:t>11/27/2024</a:t>
             </a:fld>
             <a:endParaRPr lang="en-US" dirty="0">
               <a:solidFill>
@@ -22782,7 +22782,7 @@
                 <a:cs typeface="Arial" panose="020B0604020202020204" pitchFamily="34" charset="0"/>
               </a:rPr>
               <a:pPr/>
-              <a:t>3/14/2024</a:t>
+              <a:t>11/27/2024</a:t>
             </a:fld>
             <a:endParaRPr lang="en-US" dirty="0">
               <a:solidFill>
@@ -23426,7 +23426,7 @@
                 <a:cs typeface="Arial" panose="020B0604020202020204" pitchFamily="34" charset="0"/>
               </a:rPr>
               <a:pPr/>
-              <a:t>3/14/2024</a:t>
+              <a:t>11/27/2024</a:t>
             </a:fld>
             <a:endParaRPr lang="en-US" dirty="0">
               <a:solidFill>
@@ -24313,7 +24313,7 @@
                 <a:cs typeface="Arial" panose="020B0604020202020204" pitchFamily="34" charset="0"/>
               </a:rPr>
               <a:pPr/>
-              <a:t>3/14/2024</a:t>
+              <a:t>11/27/2024</a:t>
             </a:fld>
             <a:endParaRPr lang="en-US" dirty="0">
               <a:solidFill>
@@ -25021,7 +25021,7 @@
                 <a:cs typeface="Arial" panose="020B0604020202020204" pitchFamily="34" charset="0"/>
               </a:rPr>
               <a:pPr/>
-              <a:t>3/14/2024</a:t>
+              <a:t>11/27/2024</a:t>
             </a:fld>
             <a:endParaRPr lang="en-US" dirty="0">
               <a:solidFill>
@@ -25606,7 +25606,7 @@
                 <a:cs typeface="Arial" panose="020B0604020202020204" pitchFamily="34" charset="0"/>
               </a:rPr>
               <a:pPr/>
-              <a:t>3/14/2024</a:t>
+              <a:t>11/27/2024</a:t>
             </a:fld>
             <a:endParaRPr lang="en-US" dirty="0">
               <a:solidFill>
@@ -26191,7 +26191,7 @@
                 <a:cs typeface="Arial" panose="020B0604020202020204" pitchFamily="34" charset="0"/>
               </a:rPr>
               <a:pPr/>
-              <a:t>3/14/2024</a:t>
+              <a:t>11/27/2024</a:t>
             </a:fld>
             <a:endParaRPr lang="en-US" dirty="0">
               <a:solidFill>
@@ -26776,7 +26776,7 @@
                 <a:cs typeface="Arial" panose="020B0604020202020204" pitchFamily="34" charset="0"/>
               </a:rPr>
               <a:pPr/>
-              <a:t>3/14/2024</a:t>
+              <a:t>11/27/2024</a:t>
             </a:fld>
             <a:endParaRPr lang="en-US" dirty="0">
               <a:solidFill>
@@ -27469,7 +27469,7 @@
                 <a:cs typeface="Arial" panose="020B0604020202020204" pitchFamily="34" charset="0"/>
               </a:rPr>
               <a:pPr/>
-              <a:t>3/14/2024</a:t>
+              <a:t>11/27/2024</a:t>
             </a:fld>
             <a:endParaRPr lang="en-US" dirty="0">
               <a:solidFill>

--- a/Slides/Week01/14：大型語言模型的進化.pptx
+++ b/Slides/Week01/14：大型語言模型的進化.pptx
@@ -562,7 +562,7 @@
           <a:p>
             <a:fld id="{4C5D3C8C-E7F7-4283-BD17-5CBFE586F9BA}" type="datetimeFigureOut">
               <a:rPr lang="zh-TW" altLang="en-US" smtClean="0"/>
-              <a:t>2024/11/27</a:t>
+              <a:t>2024/12/3</a:t>
             </a:fld>
             <a:endParaRPr lang="zh-TW" altLang="en-US"/>
           </a:p>
@@ -4854,7 +4854,7 @@
           <a:p>
             <a:fld id="{F0DA24C8-DA9E-4080-B56C-E24E75A7F8F7}" type="datetimeFigureOut">
               <a:rPr lang="zh-TW" altLang="en-US" smtClean="0"/>
-              <a:t>2024/11/27</a:t>
+              <a:t>2024/12/3</a:t>
             </a:fld>
             <a:endParaRPr lang="zh-TW" altLang="en-US"/>
           </a:p>
@@ -5052,7 +5052,7 @@
           <a:p>
             <a:fld id="{F0DA24C8-DA9E-4080-B56C-E24E75A7F8F7}" type="datetimeFigureOut">
               <a:rPr lang="zh-TW" altLang="en-US" smtClean="0"/>
-              <a:t>2024/11/27</a:t>
+              <a:t>2024/12/3</a:t>
             </a:fld>
             <a:endParaRPr lang="zh-TW" altLang="en-US"/>
           </a:p>
@@ -5260,7 +5260,7 @@
           <a:p>
             <a:fld id="{F0DA24C8-DA9E-4080-B56C-E24E75A7F8F7}" type="datetimeFigureOut">
               <a:rPr lang="zh-TW" altLang="en-US" smtClean="0"/>
-              <a:t>2024/11/27</a:t>
+              <a:t>2024/12/3</a:t>
             </a:fld>
             <a:endParaRPr lang="zh-TW" altLang="en-US"/>
           </a:p>
@@ -5641,7 +5641,7 @@
                 </a:solidFill>
               </a:rPr>
               <a:pPr/>
-              <a:t>11/27/2024</a:t>
+              <a:t>12/3/2024</a:t>
             </a:fld>
             <a:endParaRPr kumimoji="0" lang="en-US" dirty="0"/>
           </a:p>
@@ -5872,7 +5872,7 @@
                 </a:solidFill>
               </a:rPr>
               <a:pPr/>
-              <a:t>11/27/2024</a:t>
+              <a:t>12/3/2024</a:t>
             </a:fld>
             <a:endParaRPr kumimoji="0" lang="en-US" dirty="0"/>
           </a:p>
@@ -6105,7 +6105,7 @@
                 </a:solidFill>
               </a:rPr>
               <a:pPr/>
-              <a:t>11/27/2024</a:t>
+              <a:t>12/3/2024</a:t>
             </a:fld>
             <a:endParaRPr kumimoji="0" lang="en-US" dirty="0"/>
           </a:p>
@@ -6587,7 +6587,7 @@
                 </a:solidFill>
               </a:rPr>
               <a:pPr/>
-              <a:t>11/27/2024</a:t>
+              <a:t>12/3/2024</a:t>
             </a:fld>
             <a:endParaRPr kumimoji="0" lang="en-US" dirty="0"/>
           </a:p>
@@ -6944,7 +6944,7 @@
                 </a:solidFill>
               </a:rPr>
               <a:pPr/>
-              <a:t>11/27/2024</a:t>
+              <a:t>12/3/2024</a:t>
             </a:fld>
             <a:endParaRPr kumimoji="0" lang="en-US" dirty="0"/>
           </a:p>
@@ -7307,7 +7307,7 @@
                 </a:solidFill>
               </a:rPr>
               <a:pPr/>
-              <a:t>11/27/2024</a:t>
+              <a:t>12/3/2024</a:t>
             </a:fld>
             <a:endParaRPr kumimoji="0" lang="en-US" dirty="0"/>
           </a:p>
@@ -7617,7 +7617,7 @@
                 </a:solidFill>
               </a:rPr>
               <a:pPr/>
-              <a:t>11/27/2024</a:t>
+              <a:t>12/3/2024</a:t>
             </a:fld>
             <a:endParaRPr kumimoji="0" lang="en-US" dirty="0"/>
           </a:p>
@@ -7812,7 +7812,7 @@
           <a:p>
             <a:fld id="{F0DA24C8-DA9E-4080-B56C-E24E75A7F8F7}" type="datetimeFigureOut">
               <a:rPr lang="zh-TW" altLang="en-US" smtClean="0"/>
-              <a:t>2024/11/27</a:t>
+              <a:t>2024/12/3</a:t>
             </a:fld>
             <a:endParaRPr lang="zh-TW" altLang="en-US"/>
           </a:p>
@@ -8296,7 +8296,7 @@
                 </a:solidFill>
               </a:rPr>
               <a:pPr/>
-              <a:t>11/27/2024</a:t>
+              <a:t>12/3/2024</a:t>
             </a:fld>
             <a:endParaRPr kumimoji="0" lang="en-US" dirty="0"/>
           </a:p>
@@ -8692,7 +8692,7 @@
                 </a:solidFill>
               </a:rPr>
               <a:pPr/>
-              <a:t>11/27/2024</a:t>
+              <a:t>12/3/2024</a:t>
             </a:fld>
             <a:endParaRPr kumimoji="0" lang="en-US" dirty="0"/>
           </a:p>
@@ -9032,7 +9032,7 @@
                 </a:solidFill>
               </a:rPr>
               <a:pPr/>
-              <a:t>11/27/2024</a:t>
+              <a:t>12/3/2024</a:t>
             </a:fld>
             <a:endParaRPr kumimoji="0" lang="en-US" dirty="0"/>
           </a:p>
@@ -9613,7 +9613,7 @@
                 </a:solidFill>
               </a:rPr>
               <a:pPr/>
-              <a:t>11/27/2024</a:t>
+              <a:t>12/3/2024</a:t>
             </a:fld>
             <a:endParaRPr kumimoji="0" lang="en-US" dirty="0"/>
           </a:p>
@@ -10182,7 +10182,7 @@
                 </a:solidFill>
               </a:rPr>
               <a:pPr/>
-              <a:t>11/27/2024</a:t>
+              <a:t>12/3/2024</a:t>
             </a:fld>
             <a:endParaRPr kumimoji="0" lang="en-US" dirty="0"/>
           </a:p>
@@ -10646,7 +10646,7 @@
                 </a:solidFill>
               </a:rPr>
               <a:pPr/>
-              <a:t>11/27/2024</a:t>
+              <a:t>12/3/2024</a:t>
             </a:fld>
             <a:endParaRPr kumimoji="0" lang="en-US" dirty="0"/>
           </a:p>
@@ -11075,7 +11075,7 @@
                 </a:solidFill>
               </a:rPr>
               <a:pPr/>
-              <a:t>11/27/2024</a:t>
+              <a:t>12/3/2024</a:t>
             </a:fld>
             <a:endParaRPr kumimoji="0" lang="en-US" dirty="0"/>
           </a:p>
@@ -11584,7 +11584,7 @@
                 </a:solidFill>
               </a:rPr>
               <a:pPr/>
-              <a:t>11/27/2024</a:t>
+              <a:t>12/3/2024</a:t>
             </a:fld>
             <a:endParaRPr kumimoji="0" lang="en-US" dirty="0"/>
           </a:p>
@@ -12093,7 +12093,7 @@
                 </a:solidFill>
               </a:rPr>
               <a:pPr/>
-              <a:t>11/27/2024</a:t>
+              <a:t>12/3/2024</a:t>
             </a:fld>
             <a:endParaRPr kumimoji="0" lang="en-US" dirty="0"/>
           </a:p>
@@ -12314,7 +12314,7 @@
                 </a:solidFill>
               </a:rPr>
               <a:pPr/>
-              <a:t>11/27/2024</a:t>
+              <a:t>12/3/2024</a:t>
             </a:fld>
             <a:endParaRPr kumimoji="0" lang="en-US" dirty="0"/>
           </a:p>
@@ -12586,7 +12586,7 @@
           <a:p>
             <a:fld id="{F0DA24C8-DA9E-4080-B56C-E24E75A7F8F7}" type="datetimeFigureOut">
               <a:rPr lang="zh-TW" altLang="en-US" smtClean="0"/>
-              <a:t>2024/11/27</a:t>
+              <a:t>2024/12/3</a:t>
             </a:fld>
             <a:endParaRPr lang="zh-TW" altLang="en-US"/>
           </a:p>
@@ -12922,7 +12922,7 @@
                 </a:solidFill>
               </a:rPr>
               <a:pPr/>
-              <a:t>11/27/2024</a:t>
+              <a:t>12/3/2024</a:t>
             </a:fld>
             <a:endParaRPr kumimoji="0" lang="en-US" dirty="0"/>
           </a:p>
@@ -13146,7 +13146,7 @@
                 </a:solidFill>
               </a:rPr>
               <a:pPr/>
-              <a:t>11/27/2024</a:t>
+              <a:t>12/3/2024</a:t>
             </a:fld>
             <a:endParaRPr kumimoji="0" lang="en-US" dirty="0"/>
           </a:p>
@@ -13327,7 +13327,7 @@
             <a:fld id="{ACB2EC6F-6501-4E04-BD6C-A8A6CABB2C5B}" type="datetimeFigureOut">
               <a:rPr kumimoji="0" lang="en-US" smtClean="0"/>
               <a:pPr/>
-              <a:t>11/27/2024</a:t>
+              <a:t>12/3/2024</a:t>
             </a:fld>
             <a:endParaRPr kumimoji="0" lang="en-US" dirty="0"/>
           </a:p>
@@ -13611,7 +13611,7 @@
           <a:p>
             <a:fld id="{F0DA24C8-DA9E-4080-B56C-E24E75A7F8F7}" type="datetimeFigureOut">
               <a:rPr lang="zh-TW" altLang="en-US" smtClean="0"/>
-              <a:t>2024/11/27</a:t>
+              <a:t>2024/12/3</a:t>
             </a:fld>
             <a:endParaRPr lang="zh-TW" altLang="en-US"/>
           </a:p>
@@ -14023,7 +14023,7 @@
           <a:p>
             <a:fld id="{F0DA24C8-DA9E-4080-B56C-E24E75A7F8F7}" type="datetimeFigureOut">
               <a:rPr lang="zh-TW" altLang="en-US" smtClean="0"/>
-              <a:t>2024/11/27</a:t>
+              <a:t>2024/12/3</a:t>
             </a:fld>
             <a:endParaRPr lang="zh-TW" altLang="en-US"/>
           </a:p>
@@ -14164,7 +14164,7 @@
           <a:p>
             <a:fld id="{F0DA24C8-DA9E-4080-B56C-E24E75A7F8F7}" type="datetimeFigureOut">
               <a:rPr lang="zh-TW" altLang="en-US" smtClean="0"/>
-              <a:t>2024/11/27</a:t>
+              <a:t>2024/12/3</a:t>
             </a:fld>
             <a:endParaRPr lang="zh-TW" altLang="en-US"/>
           </a:p>
@@ -14277,7 +14277,7 @@
           <a:p>
             <a:fld id="{F0DA24C8-DA9E-4080-B56C-E24E75A7F8F7}" type="datetimeFigureOut">
               <a:rPr lang="zh-TW" altLang="en-US" smtClean="0"/>
-              <a:t>2024/11/27</a:t>
+              <a:t>2024/12/3</a:t>
             </a:fld>
             <a:endParaRPr lang="zh-TW" altLang="en-US"/>
           </a:p>
@@ -14588,7 +14588,7 @@
           <a:p>
             <a:fld id="{F0DA24C8-DA9E-4080-B56C-E24E75A7F8F7}" type="datetimeFigureOut">
               <a:rPr lang="zh-TW" altLang="en-US" smtClean="0"/>
-              <a:t>2024/11/27</a:t>
+              <a:t>2024/12/3</a:t>
             </a:fld>
             <a:endParaRPr lang="zh-TW" altLang="en-US"/>
           </a:p>
@@ -14876,7 +14876,7 @@
           <a:p>
             <a:fld id="{F0DA24C8-DA9E-4080-B56C-E24E75A7F8F7}" type="datetimeFigureOut">
               <a:rPr lang="zh-TW" altLang="en-US" smtClean="0"/>
-              <a:t>2024/11/27</a:t>
+              <a:t>2024/12/3</a:t>
             </a:fld>
             <a:endParaRPr lang="zh-TW" altLang="en-US"/>
           </a:p>
@@ -15117,7 +15117,7 @@
           <a:p>
             <a:fld id="{F0DA24C8-DA9E-4080-B56C-E24E75A7F8F7}" type="datetimeFigureOut">
               <a:rPr lang="zh-TW" altLang="en-US" smtClean="0"/>
-              <a:t>2024/11/27</a:t>
+              <a:t>2024/12/3</a:t>
             </a:fld>
             <a:endParaRPr lang="zh-TW" altLang="en-US"/>
           </a:p>
@@ -15689,7 +15689,7 @@
                 </a:solidFill>
               </a:rPr>
               <a:pPr/>
-              <a:t>11/27/2024</a:t>
+              <a:t>12/3/2024</a:t>
             </a:fld>
             <a:endParaRPr kumimoji="0" lang="en-US" sz="1200" dirty="0">
               <a:solidFill>
@@ -16235,7 +16235,7 @@
                 <a:ea typeface="新細明體" panose="02020500000000000000" pitchFamily="18" charset="-120"/>
               </a:rPr>
               <a:pPr/>
-              <a:t>11/27/2024</a:t>
+              <a:t>12/3/2024</a:t>
             </a:fld>
             <a:endParaRPr lang="en-US" dirty="0">
               <a:solidFill>
@@ -16448,7 +16448,7 @@
                 <a:cs typeface="Arial" panose="020B0604020202020204" pitchFamily="34" charset="0"/>
               </a:rPr>
               <a:pPr/>
-              <a:t>11/27/2024</a:t>
+              <a:t>12/3/2024</a:t>
             </a:fld>
             <a:endParaRPr lang="en-US" dirty="0">
               <a:solidFill>
@@ -16750,7 +16750,7 @@
                 <a:cs typeface="Arial" panose="020B0604020202020204" pitchFamily="34" charset="0"/>
               </a:rPr>
               <a:pPr/>
-              <a:t>11/27/2024</a:t>
+              <a:t>12/3/2024</a:t>
             </a:fld>
             <a:endParaRPr lang="en-US" dirty="0">
               <a:solidFill>
@@ -17115,7 +17115,7 @@
                 <a:cs typeface="Arial" panose="020B0604020202020204" pitchFamily="34" charset="0"/>
               </a:rPr>
               <a:pPr/>
-              <a:t>11/27/2024</a:t>
+              <a:t>12/3/2024</a:t>
             </a:fld>
             <a:endParaRPr lang="en-US" dirty="0">
               <a:solidFill>
@@ -17500,7 +17500,7 @@
                 <a:cs typeface="Arial" panose="020B0604020202020204" pitchFamily="34" charset="0"/>
               </a:rPr>
               <a:pPr/>
-              <a:t>11/27/2024</a:t>
+              <a:t>12/3/2024</a:t>
             </a:fld>
             <a:endParaRPr lang="en-US" dirty="0">
               <a:solidFill>
@@ -17905,7 +17905,7 @@
                 <a:cs typeface="Arial" panose="020B0604020202020204" pitchFamily="34" charset="0"/>
               </a:rPr>
               <a:pPr/>
-              <a:t>11/27/2024</a:t>
+              <a:t>12/3/2024</a:t>
             </a:fld>
             <a:endParaRPr lang="en-US" dirty="0">
               <a:solidFill>
@@ -18230,7 +18230,7 @@
                 <a:cs typeface="Arial" panose="020B0604020202020204" pitchFamily="34" charset="0"/>
               </a:rPr>
               <a:pPr/>
-              <a:t>11/27/2024</a:t>
+              <a:t>12/3/2024</a:t>
             </a:fld>
             <a:endParaRPr lang="en-US" dirty="0">
               <a:solidFill>
@@ -18536,7 +18536,7 @@
                 <a:cs typeface="Arial" panose="020B0604020202020204" pitchFamily="34" charset="0"/>
               </a:rPr>
               <a:pPr/>
-              <a:t>11/27/2024</a:t>
+              <a:t>12/3/2024</a:t>
             </a:fld>
             <a:endParaRPr lang="en-US" dirty="0">
               <a:solidFill>
@@ -18822,7 +18822,7 @@
                 <a:cs typeface="Arial" panose="020B0604020202020204" pitchFamily="34" charset="0"/>
               </a:rPr>
               <a:pPr/>
-              <a:t>11/27/2024</a:t>
+              <a:t>12/3/2024</a:t>
             </a:fld>
             <a:endParaRPr lang="en-US" dirty="0">
               <a:solidFill>
@@ -19088,7 +19088,7 @@
                 <a:cs typeface="Arial" panose="020B0604020202020204" pitchFamily="34" charset="0"/>
               </a:rPr>
               <a:pPr/>
-              <a:t>11/27/2024</a:t>
+              <a:t>12/3/2024</a:t>
             </a:fld>
             <a:endParaRPr lang="en-US" dirty="0">
               <a:solidFill>
@@ -19429,7 +19429,7 @@
                 <a:cs typeface="Arial" panose="020B0604020202020204" pitchFamily="34" charset="0"/>
               </a:rPr>
               <a:pPr/>
-              <a:t>11/27/2024</a:t>
+              <a:t>12/3/2024</a:t>
             </a:fld>
             <a:endParaRPr lang="en-US" dirty="0">
               <a:solidFill>
@@ -19851,7 +19851,7 @@
                 <a:cs typeface="Arial" panose="020B0604020202020204" pitchFamily="34" charset="0"/>
               </a:rPr>
               <a:pPr/>
-              <a:t>11/27/2024</a:t>
+              <a:t>12/3/2024</a:t>
             </a:fld>
             <a:endParaRPr lang="en-US" dirty="0">
               <a:solidFill>
@@ -20393,7 +20393,7 @@
                 <a:cs typeface="Arial" panose="020B0604020202020204" pitchFamily="34" charset="0"/>
               </a:rPr>
               <a:pPr/>
-              <a:t>11/27/2024</a:t>
+              <a:t>12/3/2024</a:t>
             </a:fld>
             <a:endParaRPr lang="en-US" dirty="0">
               <a:solidFill>
@@ -20692,7 +20692,7 @@
                 <a:cs typeface="Arial" panose="020B0604020202020204" pitchFamily="34" charset="0"/>
               </a:rPr>
               <a:pPr/>
-              <a:t>11/27/2024</a:t>
+              <a:t>12/3/2024</a:t>
             </a:fld>
             <a:endParaRPr lang="en-US" dirty="0">
               <a:solidFill>
@@ -21143,7 +21143,7 @@
                 <a:cs typeface="Arial" panose="020B0604020202020204" pitchFamily="34" charset="0"/>
               </a:rPr>
               <a:pPr/>
-              <a:t>11/27/2024</a:t>
+              <a:t>12/3/2024</a:t>
             </a:fld>
             <a:endParaRPr lang="en-US" dirty="0">
               <a:solidFill>
@@ -21460,7 +21460,7 @@
                 <a:cs typeface="Arial" panose="020B0604020202020204" pitchFamily="34" charset="0"/>
               </a:rPr>
               <a:pPr/>
-              <a:t>11/27/2024</a:t>
+              <a:t>12/3/2024</a:t>
             </a:fld>
             <a:endParaRPr lang="en-US" dirty="0">
               <a:solidFill>
@@ -21906,7 +21906,7 @@
                 <a:cs typeface="Arial" panose="020B0604020202020204" pitchFamily="34" charset="0"/>
               </a:rPr>
               <a:pPr/>
-              <a:t>11/27/2024</a:t>
+              <a:t>12/3/2024</a:t>
             </a:fld>
             <a:endParaRPr lang="en-US" dirty="0">
               <a:solidFill>
@@ -22135,7 +22135,7 @@
                 <a:cs typeface="Arial" panose="020B0604020202020204" pitchFamily="34" charset="0"/>
               </a:rPr>
               <a:pPr/>
-              <a:t>11/27/2024</a:t>
+              <a:t>12/3/2024</a:t>
             </a:fld>
             <a:endParaRPr lang="en-US" dirty="0">
               <a:solidFill>
@@ -22782,7 +22782,7 @@
                 <a:cs typeface="Arial" panose="020B0604020202020204" pitchFamily="34" charset="0"/>
               </a:rPr>
               <a:pPr/>
-              <a:t>11/27/2024</a:t>
+              <a:t>12/3/2024</a:t>
             </a:fld>
             <a:endParaRPr lang="en-US" dirty="0">
               <a:solidFill>
@@ -23426,7 +23426,7 @@
                 <a:cs typeface="Arial" panose="020B0604020202020204" pitchFamily="34" charset="0"/>
               </a:rPr>
               <a:pPr/>
-              <a:t>11/27/2024</a:t>
+              <a:t>12/3/2024</a:t>
             </a:fld>
             <a:endParaRPr lang="en-US" dirty="0">
               <a:solidFill>
@@ -24313,7 +24313,7 @@
                 <a:cs typeface="Arial" panose="020B0604020202020204" pitchFamily="34" charset="0"/>
               </a:rPr>
               <a:pPr/>
-              <a:t>11/27/2024</a:t>
+              <a:t>12/3/2024</a:t>
             </a:fld>
             <a:endParaRPr lang="en-US" dirty="0">
               <a:solidFill>
@@ -25021,7 +25021,7 @@
                 <a:cs typeface="Arial" panose="020B0604020202020204" pitchFamily="34" charset="0"/>
               </a:rPr>
               <a:pPr/>
-              <a:t>11/27/2024</a:t>
+              <a:t>12/3/2024</a:t>
             </a:fld>
             <a:endParaRPr lang="en-US" dirty="0">
               <a:solidFill>
@@ -25606,7 +25606,7 @@
                 <a:cs typeface="Arial" panose="020B0604020202020204" pitchFamily="34" charset="0"/>
               </a:rPr>
               <a:pPr/>
-              <a:t>11/27/2024</a:t>
+              <a:t>12/3/2024</a:t>
             </a:fld>
             <a:endParaRPr lang="en-US" dirty="0">
               <a:solidFill>
@@ -26191,7 +26191,7 @@
                 <a:cs typeface="Arial" panose="020B0604020202020204" pitchFamily="34" charset="0"/>
               </a:rPr>
               <a:pPr/>
-              <a:t>11/27/2024</a:t>
+              <a:t>12/3/2024</a:t>
             </a:fld>
             <a:endParaRPr lang="en-US" dirty="0">
               <a:solidFill>
@@ -26776,7 +26776,7 @@
                 <a:cs typeface="Arial" panose="020B0604020202020204" pitchFamily="34" charset="0"/>
               </a:rPr>
               <a:pPr/>
-              <a:t>11/27/2024</a:t>
+              <a:t>12/3/2024</a:t>
             </a:fld>
             <a:endParaRPr lang="en-US" dirty="0">
               <a:solidFill>
@@ -27469,7 +27469,7 @@
                 <a:cs typeface="Arial" panose="020B0604020202020204" pitchFamily="34" charset="0"/>
               </a:rPr>
               <a:pPr/>
-              <a:t>11/27/2024</a:t>
+              <a:t>12/3/2024</a:t>
             </a:fld>
             <a:endParaRPr lang="en-US" dirty="0">
               <a:solidFill>
